--- a/ゲーム科1年/01_後期/プログラミングⅢ/05_new演算子.pptx
+++ b/ゲーム科1年/01_後期/プログラミングⅢ/05_new演算子.pptx
@@ -265,7 +265,7 @@
           <a:p>
             <a:fld id="{E9CC885B-4903-4D54-9A93-00025F12DED9}" type="datetimeFigureOut">
               <a:rPr kumimoji="1" lang="ja-JP" altLang="en-US" smtClean="0"/>
-              <a:t>2024/11/8</a:t>
+              <a:t>2025/2/7</a:t>
             </a:fld>
             <a:endParaRPr kumimoji="1" lang="ja-JP" altLang="en-US"/>
           </a:p>
@@ -495,7 +495,7 @@
           <a:p>
             <a:fld id="{E9CC885B-4903-4D54-9A93-00025F12DED9}" type="datetimeFigureOut">
               <a:rPr kumimoji="1" lang="ja-JP" altLang="en-US" smtClean="0"/>
-              <a:t>2024/11/8</a:t>
+              <a:t>2025/2/7</a:t>
             </a:fld>
             <a:endParaRPr kumimoji="1" lang="ja-JP" altLang="en-US"/>
           </a:p>
@@ -735,7 +735,7 @@
           <a:p>
             <a:fld id="{E9CC885B-4903-4D54-9A93-00025F12DED9}" type="datetimeFigureOut">
               <a:rPr kumimoji="1" lang="ja-JP" altLang="en-US" smtClean="0"/>
-              <a:t>2024/11/8</a:t>
+              <a:t>2025/2/7</a:t>
             </a:fld>
             <a:endParaRPr kumimoji="1" lang="ja-JP" altLang="en-US"/>
           </a:p>
@@ -965,7 +965,7 @@
           <a:p>
             <a:fld id="{E9CC885B-4903-4D54-9A93-00025F12DED9}" type="datetimeFigureOut">
               <a:rPr kumimoji="1" lang="ja-JP" altLang="en-US" smtClean="0"/>
-              <a:t>2024/11/8</a:t>
+              <a:t>2025/2/7</a:t>
             </a:fld>
             <a:endParaRPr kumimoji="1" lang="ja-JP" altLang="en-US"/>
           </a:p>
@@ -1240,7 +1240,7 @@
           <a:p>
             <a:fld id="{E9CC885B-4903-4D54-9A93-00025F12DED9}" type="datetimeFigureOut">
               <a:rPr kumimoji="1" lang="ja-JP" altLang="en-US" smtClean="0"/>
-              <a:t>2024/11/8</a:t>
+              <a:t>2025/2/7</a:t>
             </a:fld>
             <a:endParaRPr kumimoji="1" lang="ja-JP" altLang="en-US"/>
           </a:p>
@@ -1569,7 +1569,7 @@
           <a:p>
             <a:fld id="{E9CC885B-4903-4D54-9A93-00025F12DED9}" type="datetimeFigureOut">
               <a:rPr kumimoji="1" lang="ja-JP" altLang="en-US" smtClean="0"/>
-              <a:t>2024/11/8</a:t>
+              <a:t>2025/2/7</a:t>
             </a:fld>
             <a:endParaRPr kumimoji="1" lang="ja-JP" altLang="en-US"/>
           </a:p>
@@ -2045,7 +2045,7 @@
           <a:p>
             <a:fld id="{E9CC885B-4903-4D54-9A93-00025F12DED9}" type="datetimeFigureOut">
               <a:rPr kumimoji="1" lang="ja-JP" altLang="en-US" smtClean="0"/>
-              <a:t>2024/11/8</a:t>
+              <a:t>2025/2/7</a:t>
             </a:fld>
             <a:endParaRPr kumimoji="1" lang="ja-JP" altLang="en-US"/>
           </a:p>
@@ -2186,7 +2186,7 @@
           <a:p>
             <a:fld id="{E9CC885B-4903-4D54-9A93-00025F12DED9}" type="datetimeFigureOut">
               <a:rPr kumimoji="1" lang="ja-JP" altLang="en-US" smtClean="0"/>
-              <a:t>2024/11/8</a:t>
+              <a:t>2025/2/7</a:t>
             </a:fld>
             <a:endParaRPr kumimoji="1" lang="ja-JP" altLang="en-US"/>
           </a:p>
@@ -2299,7 +2299,7 @@
           <a:p>
             <a:fld id="{E9CC885B-4903-4D54-9A93-00025F12DED9}" type="datetimeFigureOut">
               <a:rPr kumimoji="1" lang="ja-JP" altLang="en-US" smtClean="0"/>
-              <a:t>2024/11/8</a:t>
+              <a:t>2025/2/7</a:t>
             </a:fld>
             <a:endParaRPr kumimoji="1" lang="ja-JP" altLang="en-US"/>
           </a:p>
@@ -2642,7 +2642,7 @@
           <a:p>
             <a:fld id="{E9CC885B-4903-4D54-9A93-00025F12DED9}" type="datetimeFigureOut">
               <a:rPr kumimoji="1" lang="ja-JP" altLang="en-US" smtClean="0"/>
-              <a:t>2024/11/8</a:t>
+              <a:t>2025/2/7</a:t>
             </a:fld>
             <a:endParaRPr kumimoji="1" lang="ja-JP" altLang="en-US"/>
           </a:p>
@@ -2930,7 +2930,7 @@
           <a:p>
             <a:fld id="{E9CC885B-4903-4D54-9A93-00025F12DED9}" type="datetimeFigureOut">
               <a:rPr kumimoji="1" lang="ja-JP" altLang="en-US" smtClean="0"/>
-              <a:t>2024/11/8</a:t>
+              <a:t>2025/2/7</a:t>
             </a:fld>
             <a:endParaRPr kumimoji="1" lang="ja-JP" altLang="en-US"/>
           </a:p>
@@ -3203,7 +3203,7 @@
           <a:p>
             <a:fld id="{E9CC885B-4903-4D54-9A93-00025F12DED9}" type="datetimeFigureOut">
               <a:rPr kumimoji="1" lang="ja-JP" altLang="en-US" smtClean="0"/>
-              <a:t>2024/11/8</a:t>
+              <a:t>2025/2/7</a:t>
             </a:fld>
             <a:endParaRPr kumimoji="1" lang="ja-JP" altLang="en-US"/>
           </a:p>
@@ -4569,6 +4569,114 @@
       </p:grpSpPr>
       <p:sp>
         <p:nvSpPr>
+          <p:cNvPr id="18" name="四角形: 角を丸くする 17">
+            <a:extLst>
+              <a:ext uri="{FF2B5EF4-FFF2-40B4-BE49-F238E27FC236}">
+                <a16:creationId xmlns:a16="http://schemas.microsoft.com/office/drawing/2014/main" id="{17A3255F-D117-49FF-99E7-C41884559D3E}"/>
+              </a:ext>
+            </a:extLst>
+          </p:cNvPr>
+          <p:cNvSpPr/>
+          <p:nvPr/>
+        </p:nvSpPr>
+        <p:spPr>
+          <a:xfrm>
+            <a:off x="6803242" y="4467429"/>
+            <a:ext cx="4185761" cy="1002038"/>
+          </a:xfrm>
+          <a:prstGeom prst="roundRect">
+            <a:avLst/>
+          </a:prstGeom>
+          <a:solidFill>
+            <a:schemeClr val="bg1">
+              <a:lumMod val="95000"/>
+            </a:schemeClr>
+          </a:solidFill>
+          <a:ln>
+            <a:noFill/>
+          </a:ln>
+        </p:spPr>
+        <p:style>
+          <a:lnRef idx="2">
+            <a:schemeClr val="accent1">
+              <a:shade val="50000"/>
+            </a:schemeClr>
+          </a:lnRef>
+          <a:fillRef idx="1">
+            <a:schemeClr val="accent1"/>
+          </a:fillRef>
+          <a:effectRef idx="0">
+            <a:schemeClr val="accent1"/>
+          </a:effectRef>
+          <a:fontRef idx="minor">
+            <a:schemeClr val="lt1"/>
+          </a:fontRef>
+        </p:style>
+        <p:txBody>
+          <a:bodyPr rtlCol="0" anchor="ctr"/>
+          <a:lstStyle/>
+          <a:p>
+            <a:pPr algn="ctr"/>
+            <a:endParaRPr kumimoji="1" lang="ja-JP" altLang="en-US"/>
+          </a:p>
+        </p:txBody>
+      </p:sp>
+      <p:sp>
+        <p:nvSpPr>
+          <p:cNvPr id="3" name="四角形: 角を丸くする 2">
+            <a:extLst>
+              <a:ext uri="{FF2B5EF4-FFF2-40B4-BE49-F238E27FC236}">
+                <a16:creationId xmlns:a16="http://schemas.microsoft.com/office/drawing/2014/main" id="{19E7E466-F87D-4B0B-974B-3F792D97F4F4}"/>
+              </a:ext>
+            </a:extLst>
+          </p:cNvPr>
+          <p:cNvSpPr/>
+          <p:nvPr/>
+        </p:nvSpPr>
+        <p:spPr>
+          <a:xfrm>
+            <a:off x="6803242" y="2913671"/>
+            <a:ext cx="4059491" cy="1347112"/>
+          </a:xfrm>
+          <a:prstGeom prst="roundRect">
+            <a:avLst/>
+          </a:prstGeom>
+          <a:solidFill>
+            <a:schemeClr val="bg1">
+              <a:lumMod val="95000"/>
+            </a:schemeClr>
+          </a:solidFill>
+          <a:ln>
+            <a:noFill/>
+          </a:ln>
+        </p:spPr>
+        <p:style>
+          <a:lnRef idx="2">
+            <a:schemeClr val="accent1">
+              <a:shade val="50000"/>
+            </a:schemeClr>
+          </a:lnRef>
+          <a:fillRef idx="1">
+            <a:schemeClr val="accent1"/>
+          </a:fillRef>
+          <a:effectRef idx="0">
+            <a:schemeClr val="accent1"/>
+          </a:effectRef>
+          <a:fontRef idx="minor">
+            <a:schemeClr val="lt1"/>
+          </a:fontRef>
+        </p:style>
+        <p:txBody>
+          <a:bodyPr rtlCol="0" anchor="ctr"/>
+          <a:lstStyle/>
+          <a:p>
+            <a:pPr algn="ctr"/>
+            <a:endParaRPr kumimoji="1" lang="ja-JP" altLang="en-US"/>
+          </a:p>
+        </p:txBody>
+      </p:sp>
+      <p:sp>
+        <p:nvSpPr>
           <p:cNvPr id="4" name="テキスト ボックス 3">
             <a:extLst>
               <a:ext uri="{FF2B5EF4-FFF2-40B4-BE49-F238E27FC236}">
